--- a/artifacts/editorial_accent_20261022/pptx/Figure08_Accent.pptx
+++ b/artifacts/editorial_accent_20261022/pptx/Figure08_Accent.pptx
@@ -1252,7 +1252,7 @@
                     <a:ea typeface="Times New Roman"/>
                     <a:cs typeface="Times New Roman"/>
                   </a:rPr>
-                  <a:t>Task-Specific Time-Series Harness</a:t>
+                  <a:t>Task-Specific Time Series Harness</a:t>
                 </a:r>
                 <a:endParaRPr sz="2640">
                   <a:latin typeface="Comic Sans MS"/>
@@ -4388,6 +4388,10 @@
                 </a:solidFill>
               </a:ln>
             </p:spPr>
+            <p:txBody xmlns:a="http://schemas.openxmlformats.org/drawingml/2006/main">
+              <a:bodyPr/>
+              <a:p/>
+            </p:txBody>
           </p:sp>
           <p:sp>
             <p:nvSpPr>
@@ -4446,6 +4450,10 @@
                 </a:solidFill>
               </a:ln>
             </p:spPr>
+            <p:txBody xmlns:a="http://schemas.openxmlformats.org/drawingml/2006/main">
+              <a:bodyPr/>
+              <a:p/>
+            </p:txBody>
           </p:sp>
           <p:sp>
             <p:nvSpPr>
@@ -4504,6 +4512,10 @@
                 </a:solidFill>
               </a:ln>
             </p:spPr>
+            <p:txBody xmlns:a="http://schemas.openxmlformats.org/drawingml/2006/main">
+              <a:bodyPr/>
+              <a:p/>
+            </p:txBody>
           </p:sp>
           <p:sp>
             <p:nvSpPr>
@@ -4544,6 +4556,10 @@
                 </a:solidFill>
               </a:ln>
             </p:spPr>
+            <p:txBody xmlns:a="http://schemas.openxmlformats.org/drawingml/2006/main">
+              <a:bodyPr/>
+              <a:p/>
+            </p:txBody>
           </p:sp>
           <p:sp>
             <p:nvSpPr>
@@ -4584,6 +4600,10 @@
                 </a:solidFill>
               </a:ln>
             </p:spPr>
+            <p:txBody xmlns:a="http://schemas.openxmlformats.org/drawingml/2006/main">
+              <a:bodyPr/>
+              <a:p/>
+            </p:txBody>
           </p:sp>
           <p:sp>
             <p:nvSpPr>
@@ -4624,6 +4644,10 @@
                 </a:solidFill>
               </a:ln>
             </p:spPr>
+            <p:txBody xmlns:a="http://schemas.openxmlformats.org/drawingml/2006/main">
+              <a:bodyPr/>
+              <a:p/>
+            </p:txBody>
           </p:sp>
           <p:sp>
             <p:nvSpPr>
@@ -4664,6 +4688,10 @@
                 </a:solidFill>
               </a:ln>
             </p:spPr>
+            <p:txBody xmlns:a="http://schemas.openxmlformats.org/drawingml/2006/main">
+              <a:bodyPr/>
+              <a:p/>
+            </p:txBody>
           </p:sp>
           <p:sp>
             <p:nvSpPr>
@@ -4704,6 +4732,10 @@
                 </a:solidFill>
               </a:ln>
             </p:spPr>
+            <p:txBody xmlns:a="http://schemas.openxmlformats.org/drawingml/2006/main">
+              <a:bodyPr/>
+              <a:p/>
+            </p:txBody>
           </p:sp>
           <p:sp>
             <p:nvSpPr>
@@ -4744,6 +4776,10 @@
                 </a:solidFill>
               </a:ln>
             </p:spPr>
+            <p:txBody xmlns:a="http://schemas.openxmlformats.org/drawingml/2006/main">
+              <a:bodyPr/>
+              <a:p/>
+            </p:txBody>
           </p:sp>
           <p:sp>
             <p:nvSpPr>
@@ -4784,6 +4820,10 @@
                 </a:solidFill>
               </a:ln>
             </p:spPr>
+            <p:txBody xmlns:a="http://schemas.openxmlformats.org/drawingml/2006/main">
+              <a:bodyPr/>
+              <a:p/>
+            </p:txBody>
           </p:sp>
           <p:sp>
             <p:nvSpPr>
@@ -4824,6 +4864,10 @@
                 </a:solidFill>
               </a:ln>
             </p:spPr>
+            <p:txBody xmlns:a="http://schemas.openxmlformats.org/drawingml/2006/main">
+              <a:bodyPr/>
+              <a:p/>
+            </p:txBody>
           </p:sp>
           <p:sp>
             <p:nvSpPr>
@@ -4864,6 +4908,10 @@
                 </a:solidFill>
               </a:ln>
             </p:spPr>
+            <p:txBody xmlns:a="http://schemas.openxmlformats.org/drawingml/2006/main">
+              <a:bodyPr/>
+              <a:p/>
+            </p:txBody>
           </p:sp>
           <p:sp>
             <p:nvSpPr>
@@ -4912,6 +4960,10 @@
                 </a:solidFill>
               </a:ln>
             </p:spPr>
+            <p:txBody xmlns:a="http://schemas.openxmlformats.org/drawingml/2006/main">
+              <a:bodyPr/>
+              <a:p/>
+            </p:txBody>
           </p:sp>
           <p:sp>
             <p:nvSpPr>
@@ -4952,6 +5004,10 @@
                 </a:solidFill>
               </a:ln>
             </p:spPr>
+            <p:txBody xmlns:a="http://schemas.openxmlformats.org/drawingml/2006/main">
+              <a:bodyPr/>
+              <a:p/>
+            </p:txBody>
           </p:sp>
           <p:sp>
             <p:nvSpPr>
@@ -4992,6 +5048,10 @@
                 </a:solidFill>
               </a:ln>
             </p:spPr>
+            <p:txBody xmlns:a="http://schemas.openxmlformats.org/drawingml/2006/main">
+              <a:bodyPr/>
+              <a:p/>
+            </p:txBody>
           </p:sp>
           <p:sp>
             <p:nvSpPr>
@@ -5032,6 +5092,10 @@
                 </a:solidFill>
               </a:ln>
             </p:spPr>
+            <p:txBody xmlns:a="http://schemas.openxmlformats.org/drawingml/2006/main">
+              <a:bodyPr/>
+              <a:p/>
+            </p:txBody>
           </p:sp>
           <p:sp>
             <p:nvSpPr>
@@ -5110,6 +5174,10 @@
                 </a:solidFill>
               </a:ln>
             </p:spPr>
+            <p:txBody xmlns:a="http://schemas.openxmlformats.org/drawingml/2006/main">
+              <a:bodyPr/>
+              <a:p/>
+            </p:txBody>
           </p:sp>
           <p:sp>
             <p:nvSpPr>
@@ -5158,6 +5226,10 @@
                 </a:solidFill>
               </a:ln>
             </p:spPr>
+            <p:txBody xmlns:a="http://schemas.openxmlformats.org/drawingml/2006/main">
+              <a:bodyPr/>
+              <a:p/>
+            </p:txBody>
           </p:sp>
           <p:sp>
             <p:nvSpPr>
@@ -5198,6 +5270,10 @@
                 </a:solidFill>
               </a:ln>
             </p:spPr>
+            <p:txBody xmlns:a="http://schemas.openxmlformats.org/drawingml/2006/main">
+              <a:bodyPr/>
+              <a:p/>
+            </p:txBody>
           </p:sp>
           <p:sp>
             <p:nvSpPr>
@@ -5238,6 +5314,10 @@
                 </a:solidFill>
               </a:ln>
             </p:spPr>
+            <p:txBody xmlns:a="http://schemas.openxmlformats.org/drawingml/2006/main">
+              <a:bodyPr/>
+              <a:p/>
+            </p:txBody>
           </p:sp>
           <p:sp>
             <p:nvSpPr>
@@ -5278,6 +5358,10 @@
                 </a:solidFill>
               </a:ln>
             </p:spPr>
+            <p:txBody xmlns:a="http://schemas.openxmlformats.org/drawingml/2006/main">
+              <a:bodyPr/>
+              <a:p/>
+            </p:txBody>
           </p:sp>
         </p:grpSp>
         <p:grpSp>
@@ -8383,6 +8467,10 @@
                 </a:solidFill>
               </a:ln>
             </p:spPr>
+            <p:txBody xmlns:a="http://schemas.openxmlformats.org/drawingml/2006/main">
+              <a:bodyPr/>
+              <a:p/>
+            </p:txBody>
           </p:sp>
           <p:sp>
             <p:nvSpPr>
@@ -8423,6 +8511,10 @@
                 </a:solidFill>
               </a:ln>
             </p:spPr>
+            <p:txBody xmlns:a="http://schemas.openxmlformats.org/drawingml/2006/main">
+              <a:bodyPr/>
+              <a:p/>
+            </p:txBody>
           </p:sp>
           <p:sp>
             <p:nvSpPr>
@@ -8463,6 +8555,10 @@
                 </a:solidFill>
               </a:ln>
             </p:spPr>
+            <p:txBody xmlns:a="http://schemas.openxmlformats.org/drawingml/2006/main">
+              <a:bodyPr/>
+              <a:p/>
+            </p:txBody>
           </p:sp>
           <p:sp>
             <p:nvSpPr>
@@ -8503,6 +8599,10 @@
                 </a:solidFill>
               </a:ln>
             </p:spPr>
+            <p:txBody xmlns:a="http://schemas.openxmlformats.org/drawingml/2006/main">
+              <a:bodyPr/>
+              <a:p/>
+            </p:txBody>
           </p:sp>
           <p:sp>
             <p:nvSpPr>
@@ -8543,6 +8643,10 @@
                 </a:solidFill>
               </a:ln>
             </p:spPr>
+            <p:txBody xmlns:a="http://schemas.openxmlformats.org/drawingml/2006/main">
+              <a:bodyPr/>
+              <a:p/>
+            </p:txBody>
           </p:sp>
           <p:sp>
             <p:nvSpPr>
@@ -8583,6 +8687,10 @@
                 </a:solidFill>
               </a:ln>
             </p:spPr>
+            <p:txBody xmlns:a="http://schemas.openxmlformats.org/drawingml/2006/main">
+              <a:bodyPr/>
+              <a:p/>
+            </p:txBody>
           </p:sp>
           <p:sp>
             <p:nvSpPr>
@@ -8623,6 +8731,10 @@
                 </a:solidFill>
               </a:ln>
             </p:spPr>
+            <p:txBody xmlns:a="http://schemas.openxmlformats.org/drawingml/2006/main">
+              <a:bodyPr/>
+              <a:p/>
+            </p:txBody>
           </p:sp>
           <p:sp>
             <p:nvSpPr>
@@ -8663,6 +8775,10 @@
                 </a:solidFill>
               </a:ln>
             </p:spPr>
+            <p:txBody xmlns:a="http://schemas.openxmlformats.org/drawingml/2006/main">
+              <a:bodyPr/>
+              <a:p/>
+            </p:txBody>
           </p:sp>
           <p:sp>
             <p:nvSpPr>
@@ -8703,6 +8819,10 @@
                 </a:solidFill>
               </a:ln>
             </p:spPr>
+            <p:txBody xmlns:a="http://schemas.openxmlformats.org/drawingml/2006/main">
+              <a:bodyPr/>
+              <a:p/>
+            </p:txBody>
           </p:sp>
           <p:sp>
             <p:nvSpPr>
@@ -8806,6 +8926,10 @@
                 </a:solidFill>
               </a:ln>
             </p:spPr>
+            <p:txBody xmlns:a="http://schemas.openxmlformats.org/drawingml/2006/main">
+              <a:bodyPr/>
+              <a:p/>
+            </p:txBody>
           </p:sp>
           <p:sp>
             <p:nvSpPr>
@@ -8889,6 +9013,10 @@
                 </a:solidFill>
               </a:ln>
             </p:spPr>
+            <p:txBody xmlns:a="http://schemas.openxmlformats.org/drawingml/2006/main">
+              <a:bodyPr/>
+              <a:p/>
+            </p:txBody>
           </p:sp>
           <p:sp>
             <p:nvSpPr>
@@ -8963,6 +9091,10 @@
                 </a:solidFill>
               </a:ln>
             </p:spPr>
+            <p:txBody xmlns:a="http://schemas.openxmlformats.org/drawingml/2006/main">
+              <a:bodyPr/>
+              <a:p/>
+            </p:txBody>
           </p:sp>
           <p:sp>
             <p:nvSpPr>
@@ -9006,6 +9138,10 @@
                 </a:solidFill>
               </a:ln>
             </p:spPr>
+            <p:txBody xmlns:a="http://schemas.openxmlformats.org/drawingml/2006/main">
+              <a:bodyPr/>
+              <a:p/>
+            </p:txBody>
           </p:sp>
           <p:sp>
             <p:nvSpPr>
@@ -9036,6 +9172,10 @@
                 </a:solidFill>
               </a:ln>
             </p:spPr>
+            <p:txBody xmlns:a="http://schemas.openxmlformats.org/drawingml/2006/main">
+              <a:bodyPr/>
+              <a:p/>
+            </p:txBody>
           </p:sp>
           <p:sp>
             <p:nvSpPr>
@@ -9076,6 +9216,10 @@
                 </a:solidFill>
               </a:ln>
             </p:spPr>
+            <p:txBody xmlns:a="http://schemas.openxmlformats.org/drawingml/2006/main">
+              <a:bodyPr/>
+              <a:p/>
+            </p:txBody>
           </p:sp>
         </p:grpSp>
         <p:grpSp>
@@ -11976,6 +12120,10 @@
                 </a:solidFill>
               </a:ln>
             </p:spPr>
+            <p:txBody xmlns:a="http://schemas.openxmlformats.org/drawingml/2006/main">
+              <a:bodyPr/>
+              <a:p/>
+            </p:txBody>
           </p:sp>
           <p:sp>
             <p:nvSpPr>
@@ -12024,6 +12172,10 @@
                 </a:solidFill>
               </a:ln>
             </p:spPr>
+            <p:txBody xmlns:a="http://schemas.openxmlformats.org/drawingml/2006/main">
+              <a:bodyPr/>
+              <a:p/>
+            </p:txBody>
           </p:sp>
           <p:sp>
             <p:nvSpPr>
@@ -12072,6 +12224,10 @@
                 </a:solidFill>
               </a:ln>
             </p:spPr>
+            <p:txBody xmlns:a="http://schemas.openxmlformats.org/drawingml/2006/main">
+              <a:bodyPr/>
+              <a:p/>
+            </p:txBody>
           </p:sp>
           <p:sp>
             <p:nvSpPr>
@@ -12120,6 +12276,10 @@
                 </a:solidFill>
               </a:ln>
             </p:spPr>
+            <p:txBody xmlns:a="http://schemas.openxmlformats.org/drawingml/2006/main">
+              <a:bodyPr/>
+              <a:p/>
+            </p:txBody>
           </p:sp>
           <p:sp>
             <p:nvSpPr>
@@ -12150,6 +12310,10 @@
                 </a:solidFill>
               </a:ln>
             </p:spPr>
+            <p:txBody xmlns:a="http://schemas.openxmlformats.org/drawingml/2006/main">
+              <a:bodyPr/>
+              <a:p/>
+            </p:txBody>
           </p:sp>
           <p:sp>
             <p:nvSpPr>
@@ -12190,6 +12354,10 @@
                 </a:solidFill>
               </a:ln>
             </p:spPr>
+            <p:txBody xmlns:a="http://schemas.openxmlformats.org/drawingml/2006/main">
+              <a:bodyPr/>
+              <a:p/>
+            </p:txBody>
           </p:sp>
           <p:sp>
             <p:nvSpPr>
@@ -12230,6 +12398,10 @@
                 </a:solidFill>
               </a:ln>
             </p:spPr>
+            <p:txBody xmlns:a="http://schemas.openxmlformats.org/drawingml/2006/main">
+              <a:bodyPr/>
+              <a:p/>
+            </p:txBody>
           </p:sp>
           <p:sp>
             <p:nvSpPr>
@@ -12270,6 +12442,10 @@
                 </a:solidFill>
               </a:ln>
             </p:spPr>
+            <p:txBody xmlns:a="http://schemas.openxmlformats.org/drawingml/2006/main">
+              <a:bodyPr/>
+              <a:p/>
+            </p:txBody>
           </p:sp>
           <p:sp>
             <p:nvSpPr>
@@ -12310,6 +12486,10 @@
                 </a:solidFill>
               </a:ln>
             </p:spPr>
+            <p:txBody xmlns:a="http://schemas.openxmlformats.org/drawingml/2006/main">
+              <a:bodyPr/>
+              <a:p/>
+            </p:txBody>
           </p:sp>
           <p:sp>
             <p:nvSpPr>
@@ -12350,6 +12530,10 @@
                 </a:solidFill>
               </a:ln>
             </p:spPr>
+            <p:txBody xmlns:a="http://schemas.openxmlformats.org/drawingml/2006/main">
+              <a:bodyPr/>
+              <a:p/>
+            </p:txBody>
           </p:sp>
           <p:sp>
             <p:nvSpPr>
@@ -12390,6 +12574,10 @@
                 </a:solidFill>
               </a:ln>
             </p:spPr>
+            <p:txBody xmlns:a="http://schemas.openxmlformats.org/drawingml/2006/main">
+              <a:bodyPr/>
+              <a:p/>
+            </p:txBody>
           </p:sp>
           <p:sp>
             <p:nvSpPr>
@@ -12430,6 +12618,10 @@
                 </a:solidFill>
               </a:ln>
             </p:spPr>
+            <p:txBody xmlns:a="http://schemas.openxmlformats.org/drawingml/2006/main">
+              <a:bodyPr/>
+              <a:p/>
+            </p:txBody>
           </p:sp>
           <p:sp>
             <p:nvSpPr>
@@ -12470,6 +12662,10 @@
                 </a:solidFill>
               </a:ln>
             </p:spPr>
+            <p:txBody xmlns:a="http://schemas.openxmlformats.org/drawingml/2006/main">
+              <a:bodyPr/>
+              <a:p/>
+            </p:txBody>
           </p:sp>
           <p:sp>
             <p:nvSpPr>
@@ -12510,6 +12706,10 @@
                 </a:solidFill>
               </a:ln>
             </p:spPr>
+            <p:txBody xmlns:a="http://schemas.openxmlformats.org/drawingml/2006/main">
+              <a:bodyPr/>
+              <a:p/>
+            </p:txBody>
           </p:sp>
           <p:sp>
             <p:nvSpPr>
@@ -12550,6 +12750,10 @@
                 </a:solidFill>
               </a:ln>
             </p:spPr>
+            <p:txBody xmlns:a="http://schemas.openxmlformats.org/drawingml/2006/main">
+              <a:bodyPr/>
+              <a:p/>
+            </p:txBody>
           </p:sp>
           <p:sp>
             <p:nvSpPr>
@@ -12619,6 +12823,10 @@
                 </a:solidFill>
               </a:ln>
             </p:spPr>
+            <p:txBody xmlns:a="http://schemas.openxmlformats.org/drawingml/2006/main">
+              <a:bodyPr/>
+              <a:p/>
+            </p:txBody>
           </p:sp>
           <p:sp>
             <p:nvSpPr>
@@ -12688,6 +12896,10 @@
                 </a:solidFill>
               </a:ln>
             </p:spPr>
+            <p:txBody xmlns:a="http://schemas.openxmlformats.org/drawingml/2006/main">
+              <a:bodyPr/>
+              <a:p/>
+            </p:txBody>
           </p:sp>
           <p:sp>
             <p:nvSpPr>
@@ -12731,6 +12943,10 @@
                 </a:solidFill>
               </a:ln>
             </p:spPr>
+            <p:txBody xmlns:a="http://schemas.openxmlformats.org/drawingml/2006/main">
+              <a:bodyPr/>
+              <a:p/>
+            </p:txBody>
           </p:sp>
           <p:sp>
             <p:nvSpPr>
@@ -12761,6 +12977,10 @@
                 </a:solidFill>
               </a:ln>
             </p:spPr>
+            <p:txBody xmlns:a="http://schemas.openxmlformats.org/drawingml/2006/main">
+              <a:bodyPr/>
+              <a:p/>
+            </p:txBody>
           </p:sp>
           <p:sp>
             <p:nvSpPr>
@@ -12801,6 +13021,10 @@
                 </a:solidFill>
               </a:ln>
             </p:spPr>
+            <p:txBody xmlns:a="http://schemas.openxmlformats.org/drawingml/2006/main">
+              <a:bodyPr/>
+              <a:p/>
+            </p:txBody>
           </p:sp>
         </p:grpSp>
         <p:grpSp>
@@ -15526,6 +15750,10 @@
                 </a:solidFill>
               </a:ln>
             </p:spPr>
+            <p:txBody xmlns:a="http://schemas.openxmlformats.org/drawingml/2006/main">
+              <a:bodyPr/>
+              <a:p/>
+            </p:txBody>
           </p:sp>
           <p:sp>
             <p:nvSpPr>
@@ -15579,6 +15807,10 @@
                 </a:solidFill>
               </a:ln>
             </p:spPr>
+            <p:txBody xmlns:a="http://schemas.openxmlformats.org/drawingml/2006/main">
+              <a:bodyPr/>
+              <a:p/>
+            </p:txBody>
           </p:sp>
           <p:sp>
             <p:nvSpPr>
@@ -15626,6 +15858,10 @@
                 </a:solidFill>
               </a:ln>
             </p:spPr>
+            <p:txBody xmlns:a="http://schemas.openxmlformats.org/drawingml/2006/main">
+              <a:bodyPr/>
+              <a:p/>
+            </p:txBody>
           </p:sp>
           <p:sp>
             <p:nvSpPr>
@@ -15671,6 +15907,10 @@
                 </a:solidFill>
               </a:ln>
             </p:spPr>
+            <p:txBody xmlns:a="http://schemas.openxmlformats.org/drawingml/2006/main">
+              <a:bodyPr/>
+              <a:p/>
+            </p:txBody>
           </p:sp>
           <p:sp>
             <p:nvSpPr>
@@ -15701,6 +15941,10 @@
                 </a:solidFill>
               </a:ln>
             </p:spPr>
+            <p:txBody xmlns:a="http://schemas.openxmlformats.org/drawingml/2006/main">
+              <a:bodyPr/>
+              <a:p/>
+            </p:txBody>
           </p:sp>
           <p:sp>
             <p:nvSpPr>
@@ -15731,6 +15975,10 @@
                 </a:solidFill>
               </a:ln>
             </p:spPr>
+            <p:txBody xmlns:a="http://schemas.openxmlformats.org/drawingml/2006/main">
+              <a:bodyPr/>
+              <a:p/>
+            </p:txBody>
           </p:sp>
           <p:sp>
             <p:nvSpPr>
@@ -15815,6 +16063,10 @@
                 </a:solidFill>
               </a:ln>
             </p:spPr>
+            <p:txBody xmlns:a="http://schemas.openxmlformats.org/drawingml/2006/main">
+              <a:bodyPr/>
+              <a:p/>
+            </p:txBody>
           </p:sp>
           <p:sp>
             <p:nvSpPr>
@@ -15858,6 +16110,10 @@
                 </a:solidFill>
               </a:ln>
             </p:spPr>
+            <p:txBody xmlns:a="http://schemas.openxmlformats.org/drawingml/2006/main">
+              <a:bodyPr/>
+              <a:p/>
+            </p:txBody>
           </p:sp>
         </p:grpSp>
       </p:grpSp>

--- a/artifacts/editorial_accent_20261022/pptx/Figure08_Accent.pptx
+++ b/artifacts/editorial_accent_20261022/pptx/Figure08_Accent.pptx
@@ -1248,7 +1248,7 @@
                     <a:solidFill>
                       <a:srgbClr val="222222"/>
                     </a:solidFill>
-                    <a:latin typeface="Comic Sans MS"/>
+                    <a:latin typeface="Times New Roman"/>
                     <a:ea typeface="Times New Roman"/>
                     <a:cs typeface="Times New Roman"/>
                   </a:rPr>
@@ -1301,7 +1301,7 @@
                     <a:solidFill>
                       <a:srgbClr val="222222"/>
                     </a:solidFill>
-                    <a:latin typeface="Arial"/>
+                    <a:latin typeface="Times New Roman"/>
                     <a:ea typeface="Times New Roman"/>
                     <a:cs typeface="Times New Roman"/>
                   </a:rPr>
@@ -1354,7 +1354,7 @@
                     <a:solidFill>
                       <a:srgbClr val="222222"/>
                     </a:solidFill>
-                    <a:latin typeface="Arial"/>
+                    <a:latin typeface="Times New Roman"/>
                     <a:ea typeface="Times New Roman"/>
                     <a:cs typeface="Times New Roman"/>
                   </a:rPr>
@@ -1407,7 +1407,7 @@
                     <a:solidFill>
                       <a:srgbClr val="222222"/>
                     </a:solidFill>
-                    <a:latin typeface="Arial"/>
+                    <a:latin typeface="Times New Roman"/>
                     <a:ea typeface="Times New Roman"/>
                     <a:cs typeface="Times New Roman"/>
                   </a:rPr>
@@ -1460,7 +1460,7 @@
                     <a:solidFill>
                       <a:srgbClr val="222222"/>
                     </a:solidFill>
-                    <a:latin typeface="Arial"/>
+                    <a:latin typeface="Times New Roman"/>
                     <a:ea typeface="Times New Roman"/>
                     <a:cs typeface="Times New Roman"/>
                   </a:rPr>
@@ -3491,7 +3491,7 @@
                     <a:solidFill>
                       <a:srgbClr val="FFFFFF"/>
                     </a:solidFill>
-                    <a:latin typeface="Arial"/>
+                    <a:latin typeface="Times New Roman"/>
                     <a:ea typeface="Times New Roman"/>
                     <a:cs typeface="Times New Roman"/>
                   </a:rPr>
@@ -3544,7 +3544,7 @@
                     <a:solidFill>
                       <a:srgbClr val="222222"/>
                     </a:solidFill>
-                    <a:latin typeface="Comic Sans MS"/>
+                    <a:latin typeface="Times New Roman"/>
                     <a:ea typeface="Times New Roman"/>
                     <a:cs typeface="Times New Roman"/>
                   </a:rPr>
@@ -3597,7 +3597,7 @@
                     <a:solidFill>
                       <a:srgbClr val="222222"/>
                     </a:solidFill>
-                    <a:latin typeface="Arial"/>
+                    <a:latin typeface="Times New Roman"/>
                     <a:ea typeface="Times New Roman"/>
                     <a:cs typeface="Times New Roman"/>
                   </a:rPr>
@@ -3608,7 +3608,7 @@
                     <a:solidFill>
                       <a:srgbClr val="222222"/>
                     </a:solidFill>
-                    <a:latin typeface="Arial"/>
+                    <a:latin typeface="Times New Roman"/>
                     <a:ea typeface="Times New Roman"/>
                     <a:cs typeface="Times New Roman"/>
                   </a:rPr>
@@ -3661,7 +3661,7 @@
                     <a:solidFill>
                       <a:srgbClr val="222222"/>
                     </a:solidFill>
-                    <a:latin typeface="Arial"/>
+                    <a:latin typeface="Times New Roman"/>
                     <a:ea typeface="Times New Roman"/>
                     <a:cs typeface="Times New Roman"/>
                   </a:rPr>
@@ -3714,7 +3714,7 @@
                     <a:solidFill>
                       <a:srgbClr val="222222"/>
                     </a:solidFill>
-                    <a:latin typeface="Arial"/>
+                    <a:latin typeface="Times New Roman"/>
                     <a:ea typeface="Times New Roman"/>
                     <a:cs typeface="Times New Roman"/>
                   </a:rPr>
@@ -3767,7 +3767,7 @@
                     <a:solidFill>
                       <a:srgbClr val="222222"/>
                     </a:solidFill>
-                    <a:latin typeface="Arial"/>
+                    <a:latin typeface="Times New Roman"/>
                     <a:ea typeface="Times New Roman"/>
                     <a:cs typeface="Times New Roman"/>
                   </a:rPr>
@@ -3820,7 +3820,7 @@
                     <a:solidFill>
                       <a:srgbClr val="222222"/>
                     </a:solidFill>
-                    <a:latin typeface="Arial"/>
+                    <a:latin typeface="Times New Roman"/>
                     <a:ea typeface="Times New Roman"/>
                     <a:cs typeface="Times New Roman"/>
                   </a:rPr>
@@ -3873,7 +3873,7 @@
                     <a:solidFill>
                       <a:srgbClr val="222222"/>
                     </a:solidFill>
-                    <a:latin typeface="Arial"/>
+                    <a:latin typeface="Times New Roman"/>
                     <a:ea typeface="Times New Roman"/>
                     <a:cs typeface="Times New Roman"/>
                   </a:rPr>
@@ -3926,7 +3926,7 @@
                     <a:solidFill>
                       <a:srgbClr val="222222"/>
                     </a:solidFill>
-                    <a:latin typeface="Arial"/>
+                    <a:latin typeface="Times New Roman"/>
                     <a:ea typeface="Times New Roman"/>
                     <a:cs typeface="Times New Roman"/>
                   </a:rPr>
@@ -3979,7 +3979,7 @@
                     <a:solidFill>
                       <a:srgbClr val="222222"/>
                     </a:solidFill>
-                    <a:latin typeface="Arial"/>
+                    <a:latin typeface="Times New Roman"/>
                     <a:ea typeface="Times New Roman"/>
                     <a:cs typeface="Times New Roman"/>
                   </a:rPr>
@@ -4032,7 +4032,7 @@
                     <a:solidFill>
                       <a:srgbClr val="222222"/>
                     </a:solidFill>
-                    <a:latin typeface="Arial"/>
+                    <a:latin typeface="Times New Roman"/>
                     <a:ea typeface="Times New Roman"/>
                     <a:cs typeface="Times New Roman"/>
                   </a:rPr>
@@ -4085,7 +4085,7 @@
                     <a:solidFill>
                       <a:srgbClr val="222222"/>
                     </a:solidFill>
-                    <a:latin typeface="Arial"/>
+                    <a:latin typeface="Times New Roman"/>
                     <a:ea typeface="Times New Roman"/>
                     <a:cs typeface="Times New Roman"/>
                   </a:rPr>
@@ -4138,7 +4138,7 @@
                     <a:solidFill>
                       <a:srgbClr val="222222"/>
                     </a:solidFill>
-                    <a:latin typeface="Arial"/>
+                    <a:latin typeface="Times New Roman"/>
                     <a:ea typeface="Times New Roman"/>
                     <a:cs typeface="Times New Roman"/>
                   </a:rPr>
@@ -4191,7 +4191,7 @@
                     <a:solidFill>
                       <a:srgbClr val="222222"/>
                     </a:solidFill>
-                    <a:latin typeface="Arial"/>
+                    <a:latin typeface="Times New Roman"/>
                     <a:ea typeface="Times New Roman"/>
                     <a:cs typeface="Times New Roman"/>
                   </a:rPr>
@@ -4244,7 +4244,7 @@
                     <a:solidFill>
                       <a:srgbClr val="222222"/>
                     </a:solidFill>
-                    <a:latin typeface="Arial"/>
+                    <a:latin typeface="Times New Roman"/>
                     <a:ea typeface="Times New Roman"/>
                     <a:cs typeface="Times New Roman"/>
                   </a:rPr>
@@ -4297,7 +4297,7 @@
                     <a:solidFill>
                       <a:srgbClr val="222222"/>
                     </a:solidFill>
-                    <a:latin typeface="Arial"/>
+                    <a:latin typeface="Times New Roman"/>
                     <a:ea typeface="Times New Roman"/>
                     <a:cs typeface="Times New Roman"/>
                   </a:rPr>
@@ -7716,7 +7716,7 @@
                     <a:solidFill>
                       <a:srgbClr val="FFFFFF"/>
                     </a:solidFill>
-                    <a:latin typeface="Arial"/>
+                    <a:latin typeface="Times New Roman"/>
                     <a:ea typeface="Times New Roman"/>
                     <a:cs typeface="Times New Roman"/>
                   </a:rPr>
@@ -7769,7 +7769,7 @@
                     <a:solidFill>
                       <a:srgbClr val="222222"/>
                     </a:solidFill>
-                    <a:latin typeface="Comic Sans MS"/>
+                    <a:latin typeface="Times New Roman"/>
                     <a:ea typeface="Times New Roman"/>
                     <a:cs typeface="Times New Roman"/>
                   </a:rPr>
@@ -7822,7 +7822,7 @@
                     <a:solidFill>
                       <a:srgbClr val="222222"/>
                     </a:solidFill>
-                    <a:latin typeface="Arial"/>
+                    <a:latin typeface="Times New Roman"/>
                     <a:ea typeface="Times New Roman"/>
                     <a:cs typeface="Times New Roman"/>
                   </a:rPr>
@@ -7833,7 +7833,7 @@
                     <a:solidFill>
                       <a:srgbClr val="222222"/>
                     </a:solidFill>
-                    <a:latin typeface="Arial"/>
+                    <a:latin typeface="Times New Roman"/>
                     <a:ea typeface="Times New Roman"/>
                     <a:cs typeface="Times New Roman"/>
                   </a:rPr>
@@ -7886,7 +7886,7 @@
                     <a:solidFill>
                       <a:srgbClr val="222222"/>
                     </a:solidFill>
-                    <a:latin typeface="Arial"/>
+                    <a:latin typeface="Times New Roman"/>
                     <a:ea typeface="Times New Roman"/>
                     <a:cs typeface="Times New Roman"/>
                   </a:rPr>
@@ -7939,7 +7939,7 @@
                     <a:solidFill>
                       <a:srgbClr val="222222"/>
                     </a:solidFill>
-                    <a:latin typeface="Arial"/>
+                    <a:latin typeface="Times New Roman"/>
                     <a:ea typeface="Times New Roman"/>
                     <a:cs typeface="Times New Roman"/>
                   </a:rPr>
@@ -7992,7 +7992,7 @@
                     <a:solidFill>
                       <a:srgbClr val="222222"/>
                     </a:solidFill>
-                    <a:latin typeface="Arial"/>
+                    <a:latin typeface="Times New Roman"/>
                     <a:ea typeface="Times New Roman"/>
                     <a:cs typeface="Times New Roman"/>
                   </a:rPr>
@@ -8045,7 +8045,7 @@
                     <a:solidFill>
                       <a:srgbClr val="222222"/>
                     </a:solidFill>
-                    <a:latin typeface="Arial"/>
+                    <a:latin typeface="Times New Roman"/>
                     <a:ea typeface="Times New Roman"/>
                     <a:cs typeface="Times New Roman"/>
                   </a:rPr>
@@ -8098,7 +8098,7 @@
                     <a:solidFill>
                       <a:srgbClr val="222222"/>
                     </a:solidFill>
-                    <a:latin typeface="Arial"/>
+                    <a:latin typeface="Times New Roman"/>
                     <a:ea typeface="Times New Roman"/>
                     <a:cs typeface="Times New Roman"/>
                   </a:rPr>
@@ -8151,7 +8151,7 @@
                     <a:solidFill>
                       <a:srgbClr val="222222"/>
                     </a:solidFill>
-                    <a:latin typeface="Arial"/>
+                    <a:latin typeface="Times New Roman"/>
                     <a:ea typeface="Times New Roman"/>
                     <a:cs typeface="Times New Roman"/>
                   </a:rPr>
@@ -8204,7 +8204,7 @@
                     <a:solidFill>
                       <a:srgbClr val="222222"/>
                     </a:solidFill>
-                    <a:latin typeface="Arial"/>
+                    <a:latin typeface="Times New Roman"/>
                     <a:ea typeface="Times New Roman"/>
                     <a:cs typeface="Times New Roman"/>
                   </a:rPr>
@@ -8257,7 +8257,7 @@
                     <a:solidFill>
                       <a:srgbClr val="222222"/>
                     </a:solidFill>
-                    <a:latin typeface="Arial"/>
+                    <a:latin typeface="Times New Roman"/>
                     <a:ea typeface="Times New Roman"/>
                     <a:cs typeface="Times New Roman"/>
                   </a:rPr>
@@ -8310,7 +8310,7 @@
                     <a:solidFill>
                       <a:srgbClr val="222222"/>
                     </a:solidFill>
-                    <a:latin typeface="Arial"/>
+                    <a:latin typeface="Times New Roman"/>
                     <a:ea typeface="Times New Roman"/>
                     <a:cs typeface="Times New Roman"/>
                   </a:rPr>
@@ -8363,7 +8363,7 @@
                     <a:solidFill>
                       <a:srgbClr val="222222"/>
                     </a:solidFill>
-                    <a:latin typeface="Arial"/>
+                    <a:latin typeface="Times New Roman"/>
                     <a:ea typeface="Times New Roman"/>
                     <a:cs typeface="Times New Roman"/>
                   </a:rPr>
@@ -8416,7 +8416,7 @@
                     <a:solidFill>
                       <a:srgbClr val="222222"/>
                     </a:solidFill>
-                    <a:latin typeface="Arial"/>
+                    <a:latin typeface="Times New Roman"/>
                     <a:ea typeface="Times New Roman"/>
                     <a:cs typeface="Times New Roman"/>
                   </a:rPr>
@@ -11342,7 +11342,7 @@
                     <a:solidFill>
                       <a:srgbClr val="FFFFFF"/>
                     </a:solidFill>
-                    <a:latin typeface="Arial"/>
+                    <a:latin typeface="Times New Roman"/>
                     <a:ea typeface="Times New Roman"/>
                     <a:cs typeface="Times New Roman"/>
                   </a:rPr>
@@ -11395,7 +11395,7 @@
                     <a:solidFill>
                       <a:srgbClr val="222222"/>
                     </a:solidFill>
-                    <a:latin typeface="Comic Sans MS"/>
+                    <a:latin typeface="Times New Roman"/>
                     <a:ea typeface="Times New Roman"/>
                     <a:cs typeface="Times New Roman"/>
                   </a:rPr>
@@ -11448,7 +11448,7 @@
                     <a:solidFill>
                       <a:srgbClr val="222222"/>
                     </a:solidFill>
-                    <a:latin typeface="Arial"/>
+                    <a:latin typeface="Times New Roman"/>
                     <a:ea typeface="Times New Roman"/>
                     <a:cs typeface="Times New Roman"/>
                   </a:rPr>
@@ -11459,7 +11459,7 @@
                     <a:solidFill>
                       <a:srgbClr val="222222"/>
                     </a:solidFill>
-                    <a:latin typeface="Arial"/>
+                    <a:latin typeface="Times New Roman"/>
                     <a:ea typeface="Times New Roman"/>
                     <a:cs typeface="Times New Roman"/>
                   </a:rPr>
@@ -11512,7 +11512,7 @@
                     <a:solidFill>
                       <a:srgbClr val="222222"/>
                     </a:solidFill>
-                    <a:latin typeface="Arial"/>
+                    <a:latin typeface="Times New Roman"/>
                     <a:ea typeface="Times New Roman"/>
                     <a:cs typeface="Times New Roman"/>
                   </a:rPr>
@@ -11565,7 +11565,7 @@
                     <a:solidFill>
                       <a:srgbClr val="222222"/>
                     </a:solidFill>
-                    <a:latin typeface="Arial"/>
+                    <a:latin typeface="Times New Roman"/>
                     <a:ea typeface="Times New Roman"/>
                     <a:cs typeface="Times New Roman"/>
                   </a:rPr>
@@ -11618,7 +11618,7 @@
                     <a:solidFill>
                       <a:srgbClr val="222222"/>
                     </a:solidFill>
-                    <a:latin typeface="Arial"/>
+                    <a:latin typeface="Times New Roman"/>
                     <a:ea typeface="Times New Roman"/>
                     <a:cs typeface="Times New Roman"/>
                   </a:rPr>
@@ -11671,7 +11671,7 @@
                     <a:solidFill>
                       <a:srgbClr val="222222"/>
                     </a:solidFill>
-                    <a:latin typeface="Arial"/>
+                    <a:latin typeface="Times New Roman"/>
                     <a:ea typeface="Times New Roman"/>
                     <a:cs typeface="Times New Roman"/>
                   </a:rPr>
@@ -11724,7 +11724,7 @@
                     <a:solidFill>
                       <a:srgbClr val="222222"/>
                     </a:solidFill>
-                    <a:latin typeface="Arial"/>
+                    <a:latin typeface="Times New Roman"/>
                     <a:ea typeface="Times New Roman"/>
                     <a:cs typeface="Times New Roman"/>
                   </a:rPr>
@@ -11777,7 +11777,7 @@
                     <a:solidFill>
                       <a:srgbClr val="222222"/>
                     </a:solidFill>
-                    <a:latin typeface="Arial"/>
+                    <a:latin typeface="Times New Roman"/>
                     <a:ea typeface="Times New Roman"/>
                     <a:cs typeface="Times New Roman"/>
                   </a:rPr>
@@ -11830,7 +11830,7 @@
                     <a:solidFill>
                       <a:srgbClr val="222222"/>
                     </a:solidFill>
-                    <a:latin typeface="Arial"/>
+                    <a:latin typeface="Times New Roman"/>
                     <a:ea typeface="Times New Roman"/>
                     <a:cs typeface="Times New Roman"/>
                   </a:rPr>
@@ -11883,7 +11883,7 @@
                     <a:solidFill>
                       <a:srgbClr val="222222"/>
                     </a:solidFill>
-                    <a:latin typeface="Arial"/>
+                    <a:latin typeface="Times New Roman"/>
                     <a:ea typeface="Times New Roman"/>
                     <a:cs typeface="Times New Roman"/>
                   </a:rPr>
@@ -11936,7 +11936,7 @@
                     <a:solidFill>
                       <a:srgbClr val="222222"/>
                     </a:solidFill>
-                    <a:latin typeface="Arial"/>
+                    <a:latin typeface="Times New Roman"/>
                     <a:ea typeface="Times New Roman"/>
                     <a:cs typeface="Times New Roman"/>
                   </a:rPr>
@@ -11989,7 +11989,7 @@
                     <a:solidFill>
                       <a:srgbClr val="222222"/>
                     </a:solidFill>
-                    <a:latin typeface="Arial"/>
+                    <a:latin typeface="Times New Roman"/>
                     <a:ea typeface="Times New Roman"/>
                     <a:cs typeface="Times New Roman"/>
                   </a:rPr>
@@ -12042,7 +12042,7 @@
                     <a:solidFill>
                       <a:srgbClr val="222222"/>
                     </a:solidFill>
-                    <a:latin typeface="Arial"/>
+                    <a:latin typeface="Times New Roman"/>
                     <a:ea typeface="Times New Roman"/>
                     <a:cs typeface="Times New Roman"/>
                   </a:rPr>
@@ -12061,7 +12061,7 @@
                     <a:solidFill>
                       <a:srgbClr val="222222"/>
                     </a:solidFill>
-                    <a:latin typeface="Arial"/>
+                    <a:latin typeface="Times New Roman"/>
                     <a:ea typeface="Times New Roman"/>
                     <a:cs typeface="Times New Roman"/>
                   </a:rPr>
@@ -15043,7 +15043,7 @@
                     <a:solidFill>
                       <a:srgbClr val="FFFFFF"/>
                     </a:solidFill>
-                    <a:latin typeface="Arial"/>
+                    <a:latin typeface="Times New Roman"/>
                     <a:ea typeface="Times New Roman"/>
                     <a:cs typeface="Times New Roman"/>
                   </a:rPr>
@@ -15096,7 +15096,7 @@
                     <a:solidFill>
                       <a:srgbClr val="222222"/>
                     </a:solidFill>
-                    <a:latin typeface="Comic Sans MS"/>
+                    <a:latin typeface="Times New Roman"/>
                     <a:ea typeface="Times New Roman"/>
                     <a:cs typeface="Times New Roman"/>
                   </a:rPr>
@@ -15149,7 +15149,7 @@
                     <a:solidFill>
                       <a:srgbClr val="222222"/>
                     </a:solidFill>
-                    <a:latin typeface="Arial"/>
+                    <a:latin typeface="Times New Roman"/>
                     <a:ea typeface="Times New Roman"/>
                     <a:cs typeface="Times New Roman"/>
                   </a:rPr>
@@ -15160,7 +15160,7 @@
                     <a:solidFill>
                       <a:srgbClr val="222222"/>
                     </a:solidFill>
-                    <a:latin typeface="Arial"/>
+                    <a:latin typeface="Times New Roman"/>
                     <a:ea typeface="Times New Roman"/>
                     <a:cs typeface="Times New Roman"/>
                   </a:rPr>
@@ -15213,7 +15213,7 @@
                     <a:solidFill>
                       <a:srgbClr val="222222"/>
                     </a:solidFill>
-                    <a:latin typeface="Arial"/>
+                    <a:latin typeface="Times New Roman"/>
                     <a:ea typeface="Times New Roman"/>
                     <a:cs typeface="Times New Roman"/>
                   </a:rPr>
@@ -15266,7 +15266,7 @@
                     <a:solidFill>
                       <a:srgbClr val="222222"/>
                     </a:solidFill>
-                    <a:latin typeface="Arial"/>
+                    <a:latin typeface="Times New Roman"/>
                     <a:ea typeface="Times New Roman"/>
                     <a:cs typeface="Times New Roman"/>
                   </a:rPr>
@@ -15319,7 +15319,7 @@
                     <a:solidFill>
                       <a:srgbClr val="222222"/>
                     </a:solidFill>
-                    <a:latin typeface="Arial"/>
+                    <a:latin typeface="Times New Roman"/>
                     <a:ea typeface="Times New Roman"/>
                     <a:cs typeface="Times New Roman"/>
                   </a:rPr>
@@ -15372,7 +15372,7 @@
                     <a:solidFill>
                       <a:srgbClr val="222222"/>
                     </a:solidFill>
-                    <a:latin typeface="Arial"/>
+                    <a:latin typeface="Times New Roman"/>
                     <a:ea typeface="Times New Roman"/>
                     <a:cs typeface="Times New Roman"/>
                   </a:rPr>
@@ -15425,7 +15425,7 @@
                     <a:solidFill>
                       <a:srgbClr val="222222"/>
                     </a:solidFill>
-                    <a:latin typeface="Arial"/>
+                    <a:latin typeface="Times New Roman"/>
                     <a:ea typeface="Times New Roman"/>
                     <a:cs typeface="Times New Roman"/>
                   </a:rPr>
@@ -15478,7 +15478,7 @@
                     <a:solidFill>
                       <a:srgbClr val="222222"/>
                     </a:solidFill>
-                    <a:latin typeface="Arial"/>
+                    <a:latin typeface="Times New Roman"/>
                     <a:ea typeface="Times New Roman"/>
                     <a:cs typeface="Times New Roman"/>
                   </a:rPr>
@@ -15531,7 +15531,7 @@
                     <a:solidFill>
                       <a:srgbClr val="222222"/>
                     </a:solidFill>
-                    <a:latin typeface="Arial"/>
+                    <a:latin typeface="Times New Roman"/>
                     <a:ea typeface="Times New Roman"/>
                     <a:cs typeface="Times New Roman"/>
                   </a:rPr>
@@ -15550,7 +15550,7 @@
                     <a:solidFill>
                       <a:srgbClr val="222222"/>
                     </a:solidFill>
-                    <a:latin typeface="Arial"/>
+                    <a:latin typeface="Times New Roman"/>
                     <a:ea typeface="Times New Roman"/>
                     <a:cs typeface="Times New Roman"/>
                   </a:rPr>
@@ -15603,7 +15603,7 @@
                     <a:solidFill>
                       <a:srgbClr val="222222"/>
                     </a:solidFill>
-                    <a:latin typeface="Arial"/>
+                    <a:latin typeface="Times New Roman"/>
                     <a:ea typeface="Times New Roman"/>
                     <a:cs typeface="Times New Roman"/>
                   </a:rPr>
@@ -15656,7 +15656,7 @@
                     <a:solidFill>
                       <a:srgbClr val="222222"/>
                     </a:solidFill>
-                    <a:latin typeface="Arial"/>
+                    <a:latin typeface="Times New Roman"/>
                     <a:ea typeface="Times New Roman"/>
                     <a:cs typeface="Times New Roman"/>
                   </a:rPr>
@@ -15709,7 +15709,7 @@
                     <a:solidFill>
                       <a:srgbClr val="222222"/>
                     </a:solidFill>
-                    <a:latin typeface="Arial"/>
+                    <a:latin typeface="Times New Roman"/>
                     <a:ea typeface="Times New Roman"/>
                     <a:cs typeface="Times New Roman"/>
                   </a:rPr>

--- a/artifacts/editorial_accent_20261022/pptx/Figure08_Accent.pptx
+++ b/artifacts/editorial_accent_20261022/pptx/Figure08_Accent.pptx
@@ -1248,7 +1248,7 @@
                     <a:solidFill>
                       <a:srgbClr val="222222"/>
                     </a:solidFill>
-                    <a:latin typeface="Times New Roman"/>
+                    <a:latin typeface="Comic Sans MS"/>
                     <a:ea typeface="Times New Roman"/>
                     <a:cs typeface="Times New Roman"/>
                   </a:rPr>
@@ -1301,7 +1301,7 @@
                     <a:solidFill>
                       <a:srgbClr val="222222"/>
                     </a:solidFill>
-                    <a:latin typeface="Times New Roman"/>
+                    <a:latin typeface="Arial"/>
                     <a:ea typeface="Times New Roman"/>
                     <a:cs typeface="Times New Roman"/>
                   </a:rPr>
@@ -1354,7 +1354,7 @@
                     <a:solidFill>
                       <a:srgbClr val="222222"/>
                     </a:solidFill>
-                    <a:latin typeface="Times New Roman"/>
+                    <a:latin typeface="Arial"/>
                     <a:ea typeface="Times New Roman"/>
                     <a:cs typeface="Times New Roman"/>
                   </a:rPr>
@@ -1407,7 +1407,7 @@
                     <a:solidFill>
                       <a:srgbClr val="222222"/>
                     </a:solidFill>
-                    <a:latin typeface="Times New Roman"/>
+                    <a:latin typeface="Arial"/>
                     <a:ea typeface="Times New Roman"/>
                     <a:cs typeface="Times New Roman"/>
                   </a:rPr>
@@ -1460,7 +1460,7 @@
                     <a:solidFill>
                       <a:srgbClr val="222222"/>
                     </a:solidFill>
-                    <a:latin typeface="Times New Roman"/>
+                    <a:latin typeface="Arial"/>
                     <a:ea typeface="Times New Roman"/>
                     <a:cs typeface="Times New Roman"/>
                   </a:rPr>
@@ -3491,7 +3491,7 @@
                     <a:solidFill>
                       <a:srgbClr val="FFFFFF"/>
                     </a:solidFill>
-                    <a:latin typeface="Times New Roman"/>
+                    <a:latin typeface="Arial"/>
                     <a:ea typeface="Times New Roman"/>
                     <a:cs typeface="Times New Roman"/>
                   </a:rPr>
@@ -3544,7 +3544,7 @@
                     <a:solidFill>
                       <a:srgbClr val="222222"/>
                     </a:solidFill>
-                    <a:latin typeface="Times New Roman"/>
+                    <a:latin typeface="Comic Sans MS"/>
                     <a:ea typeface="Times New Roman"/>
                     <a:cs typeface="Times New Roman"/>
                   </a:rPr>
@@ -3597,7 +3597,7 @@
                     <a:solidFill>
                       <a:srgbClr val="222222"/>
                     </a:solidFill>
-                    <a:latin typeface="Times New Roman"/>
+                    <a:latin typeface="Arial"/>
                     <a:ea typeface="Times New Roman"/>
                     <a:cs typeface="Times New Roman"/>
                   </a:rPr>
@@ -3608,7 +3608,7 @@
                     <a:solidFill>
                       <a:srgbClr val="222222"/>
                     </a:solidFill>
-                    <a:latin typeface="Times New Roman"/>
+                    <a:latin typeface="Arial"/>
                     <a:ea typeface="Times New Roman"/>
                     <a:cs typeface="Times New Roman"/>
                   </a:rPr>
@@ -3661,7 +3661,7 @@
                     <a:solidFill>
                       <a:srgbClr val="222222"/>
                     </a:solidFill>
-                    <a:latin typeface="Times New Roman"/>
+                    <a:latin typeface="Arial"/>
                     <a:ea typeface="Times New Roman"/>
                     <a:cs typeface="Times New Roman"/>
                   </a:rPr>
@@ -3714,7 +3714,7 @@
                     <a:solidFill>
                       <a:srgbClr val="222222"/>
                     </a:solidFill>
-                    <a:latin typeface="Times New Roman"/>
+                    <a:latin typeface="Arial"/>
                     <a:ea typeface="Times New Roman"/>
                     <a:cs typeface="Times New Roman"/>
                   </a:rPr>
@@ -3767,7 +3767,7 @@
                     <a:solidFill>
                       <a:srgbClr val="222222"/>
                     </a:solidFill>
-                    <a:latin typeface="Times New Roman"/>
+                    <a:latin typeface="Arial"/>
                     <a:ea typeface="Times New Roman"/>
                     <a:cs typeface="Times New Roman"/>
                   </a:rPr>
@@ -3820,7 +3820,7 @@
                     <a:solidFill>
                       <a:srgbClr val="222222"/>
                     </a:solidFill>
-                    <a:latin typeface="Times New Roman"/>
+                    <a:latin typeface="Arial"/>
                     <a:ea typeface="Times New Roman"/>
                     <a:cs typeface="Times New Roman"/>
                   </a:rPr>
@@ -3873,7 +3873,7 @@
                     <a:solidFill>
                       <a:srgbClr val="222222"/>
                     </a:solidFill>
-                    <a:latin typeface="Times New Roman"/>
+                    <a:latin typeface="Arial"/>
                     <a:ea typeface="Times New Roman"/>
                     <a:cs typeface="Times New Roman"/>
                   </a:rPr>
@@ -3926,7 +3926,7 @@
                     <a:solidFill>
                       <a:srgbClr val="222222"/>
                     </a:solidFill>
-                    <a:latin typeface="Times New Roman"/>
+                    <a:latin typeface="Arial"/>
                     <a:ea typeface="Times New Roman"/>
                     <a:cs typeface="Times New Roman"/>
                   </a:rPr>
@@ -3979,7 +3979,7 @@
                     <a:solidFill>
                       <a:srgbClr val="222222"/>
                     </a:solidFill>
-                    <a:latin typeface="Times New Roman"/>
+                    <a:latin typeface="Arial"/>
                     <a:ea typeface="Times New Roman"/>
                     <a:cs typeface="Times New Roman"/>
                   </a:rPr>
@@ -4032,7 +4032,7 @@
                     <a:solidFill>
                       <a:srgbClr val="222222"/>
                     </a:solidFill>
-                    <a:latin typeface="Times New Roman"/>
+                    <a:latin typeface="Arial"/>
                     <a:ea typeface="Times New Roman"/>
                     <a:cs typeface="Times New Roman"/>
                   </a:rPr>
@@ -4085,7 +4085,7 @@
                     <a:solidFill>
                       <a:srgbClr val="222222"/>
                     </a:solidFill>
-                    <a:latin typeface="Times New Roman"/>
+                    <a:latin typeface="Arial"/>
                     <a:ea typeface="Times New Roman"/>
                     <a:cs typeface="Times New Roman"/>
                   </a:rPr>
@@ -4138,7 +4138,7 @@
                     <a:solidFill>
                       <a:srgbClr val="222222"/>
                     </a:solidFill>
-                    <a:latin typeface="Times New Roman"/>
+                    <a:latin typeface="Arial"/>
                     <a:ea typeface="Times New Roman"/>
                     <a:cs typeface="Times New Roman"/>
                   </a:rPr>
@@ -4191,7 +4191,7 @@
                     <a:solidFill>
                       <a:srgbClr val="222222"/>
                     </a:solidFill>
-                    <a:latin typeface="Times New Roman"/>
+                    <a:latin typeface="Arial"/>
                     <a:ea typeface="Times New Roman"/>
                     <a:cs typeface="Times New Roman"/>
                   </a:rPr>
@@ -4244,7 +4244,7 @@
                     <a:solidFill>
                       <a:srgbClr val="222222"/>
                     </a:solidFill>
-                    <a:latin typeface="Times New Roman"/>
+                    <a:latin typeface="Arial"/>
                     <a:ea typeface="Times New Roman"/>
                     <a:cs typeface="Times New Roman"/>
                   </a:rPr>
@@ -4297,7 +4297,7 @@
                     <a:solidFill>
                       <a:srgbClr val="222222"/>
                     </a:solidFill>
-                    <a:latin typeface="Times New Roman"/>
+                    <a:latin typeface="Arial"/>
                     <a:ea typeface="Times New Roman"/>
                     <a:cs typeface="Times New Roman"/>
                   </a:rPr>
@@ -7716,7 +7716,7 @@
                     <a:solidFill>
                       <a:srgbClr val="FFFFFF"/>
                     </a:solidFill>
-                    <a:latin typeface="Times New Roman"/>
+                    <a:latin typeface="Arial"/>
                     <a:ea typeface="Times New Roman"/>
                     <a:cs typeface="Times New Roman"/>
                   </a:rPr>
@@ -7769,7 +7769,7 @@
                     <a:solidFill>
                       <a:srgbClr val="222222"/>
                     </a:solidFill>
-                    <a:latin typeface="Times New Roman"/>
+                    <a:latin typeface="Comic Sans MS"/>
                     <a:ea typeface="Times New Roman"/>
                     <a:cs typeface="Times New Roman"/>
                   </a:rPr>
@@ -7822,7 +7822,7 @@
                     <a:solidFill>
                       <a:srgbClr val="222222"/>
                     </a:solidFill>
-                    <a:latin typeface="Times New Roman"/>
+                    <a:latin typeface="Arial"/>
                     <a:ea typeface="Times New Roman"/>
                     <a:cs typeface="Times New Roman"/>
                   </a:rPr>
@@ -7833,7 +7833,7 @@
                     <a:solidFill>
                       <a:srgbClr val="222222"/>
                     </a:solidFill>
-                    <a:latin typeface="Times New Roman"/>
+                    <a:latin typeface="Arial"/>
                     <a:ea typeface="Times New Roman"/>
                     <a:cs typeface="Times New Roman"/>
                   </a:rPr>
@@ -7886,7 +7886,7 @@
                     <a:solidFill>
                       <a:srgbClr val="222222"/>
                     </a:solidFill>
-                    <a:latin typeface="Times New Roman"/>
+                    <a:latin typeface="Arial"/>
                     <a:ea typeface="Times New Roman"/>
                     <a:cs typeface="Times New Roman"/>
                   </a:rPr>
@@ -7939,7 +7939,7 @@
                     <a:solidFill>
                       <a:srgbClr val="222222"/>
                     </a:solidFill>
-                    <a:latin typeface="Times New Roman"/>
+                    <a:latin typeface="Arial"/>
                     <a:ea typeface="Times New Roman"/>
                     <a:cs typeface="Times New Roman"/>
                   </a:rPr>
@@ -7992,7 +7992,7 @@
                     <a:solidFill>
                       <a:srgbClr val="222222"/>
                     </a:solidFill>
-                    <a:latin typeface="Times New Roman"/>
+                    <a:latin typeface="Arial"/>
                     <a:ea typeface="Times New Roman"/>
                     <a:cs typeface="Times New Roman"/>
                   </a:rPr>
@@ -8045,7 +8045,7 @@
                     <a:solidFill>
                       <a:srgbClr val="222222"/>
                     </a:solidFill>
-                    <a:latin typeface="Times New Roman"/>
+                    <a:latin typeface="Arial"/>
                     <a:ea typeface="Times New Roman"/>
                     <a:cs typeface="Times New Roman"/>
                   </a:rPr>
@@ -8098,7 +8098,7 @@
                     <a:solidFill>
                       <a:srgbClr val="222222"/>
                     </a:solidFill>
-                    <a:latin typeface="Times New Roman"/>
+                    <a:latin typeface="Arial"/>
                     <a:ea typeface="Times New Roman"/>
                     <a:cs typeface="Times New Roman"/>
                   </a:rPr>
@@ -8151,7 +8151,7 @@
                     <a:solidFill>
                       <a:srgbClr val="222222"/>
                     </a:solidFill>
-                    <a:latin typeface="Times New Roman"/>
+                    <a:latin typeface="Arial"/>
                     <a:ea typeface="Times New Roman"/>
                     <a:cs typeface="Times New Roman"/>
                   </a:rPr>
@@ -8204,7 +8204,7 @@
                     <a:solidFill>
                       <a:srgbClr val="222222"/>
                     </a:solidFill>
-                    <a:latin typeface="Times New Roman"/>
+                    <a:latin typeface="Arial"/>
                     <a:ea typeface="Times New Roman"/>
                     <a:cs typeface="Times New Roman"/>
                   </a:rPr>
@@ -8257,7 +8257,7 @@
                     <a:solidFill>
                       <a:srgbClr val="222222"/>
                     </a:solidFill>
-                    <a:latin typeface="Times New Roman"/>
+                    <a:latin typeface="Arial"/>
                     <a:ea typeface="Times New Roman"/>
                     <a:cs typeface="Times New Roman"/>
                   </a:rPr>
@@ -8310,7 +8310,7 @@
                     <a:solidFill>
                       <a:srgbClr val="222222"/>
                     </a:solidFill>
-                    <a:latin typeface="Times New Roman"/>
+                    <a:latin typeface="Arial"/>
                     <a:ea typeface="Times New Roman"/>
                     <a:cs typeface="Times New Roman"/>
                   </a:rPr>
@@ -8363,7 +8363,7 @@
                     <a:solidFill>
                       <a:srgbClr val="222222"/>
                     </a:solidFill>
-                    <a:latin typeface="Times New Roman"/>
+                    <a:latin typeface="Arial"/>
                     <a:ea typeface="Times New Roman"/>
                     <a:cs typeface="Times New Roman"/>
                   </a:rPr>
@@ -8416,7 +8416,7 @@
                     <a:solidFill>
                       <a:srgbClr val="222222"/>
                     </a:solidFill>
-                    <a:latin typeface="Times New Roman"/>
+                    <a:latin typeface="Arial"/>
                     <a:ea typeface="Times New Roman"/>
                     <a:cs typeface="Times New Roman"/>
                   </a:rPr>
@@ -11342,7 +11342,7 @@
                     <a:solidFill>
                       <a:srgbClr val="FFFFFF"/>
                     </a:solidFill>
-                    <a:latin typeface="Times New Roman"/>
+                    <a:latin typeface="Arial"/>
                     <a:ea typeface="Times New Roman"/>
                     <a:cs typeface="Times New Roman"/>
                   </a:rPr>
@@ -11395,7 +11395,7 @@
                     <a:solidFill>
                       <a:srgbClr val="222222"/>
                     </a:solidFill>
-                    <a:latin typeface="Times New Roman"/>
+                    <a:latin typeface="Comic Sans MS"/>
                     <a:ea typeface="Times New Roman"/>
                     <a:cs typeface="Times New Roman"/>
                   </a:rPr>
@@ -11448,7 +11448,7 @@
                     <a:solidFill>
                       <a:srgbClr val="222222"/>
                     </a:solidFill>
-                    <a:latin typeface="Times New Roman"/>
+                    <a:latin typeface="Arial"/>
                     <a:ea typeface="Times New Roman"/>
                     <a:cs typeface="Times New Roman"/>
                   </a:rPr>
@@ -11459,7 +11459,7 @@
                     <a:solidFill>
                       <a:srgbClr val="222222"/>
                     </a:solidFill>
-                    <a:latin typeface="Times New Roman"/>
+                    <a:latin typeface="Arial"/>
                     <a:ea typeface="Times New Roman"/>
                     <a:cs typeface="Times New Roman"/>
                   </a:rPr>
@@ -11512,7 +11512,7 @@
                     <a:solidFill>
                       <a:srgbClr val="222222"/>
                     </a:solidFill>
-                    <a:latin typeface="Times New Roman"/>
+                    <a:latin typeface="Arial"/>
                     <a:ea typeface="Times New Roman"/>
                     <a:cs typeface="Times New Roman"/>
                   </a:rPr>
@@ -11565,7 +11565,7 @@
                     <a:solidFill>
                       <a:srgbClr val="222222"/>
                     </a:solidFill>
-                    <a:latin typeface="Times New Roman"/>
+                    <a:latin typeface="Arial"/>
                     <a:ea typeface="Times New Roman"/>
                     <a:cs typeface="Times New Roman"/>
                   </a:rPr>
@@ -11618,7 +11618,7 @@
                     <a:solidFill>
                       <a:srgbClr val="222222"/>
                     </a:solidFill>
-                    <a:latin typeface="Times New Roman"/>
+                    <a:latin typeface="Arial"/>
                     <a:ea typeface="Times New Roman"/>
                     <a:cs typeface="Times New Roman"/>
                   </a:rPr>
@@ -11671,7 +11671,7 @@
                     <a:solidFill>
                       <a:srgbClr val="222222"/>
                     </a:solidFill>
-                    <a:latin typeface="Times New Roman"/>
+                    <a:latin typeface="Arial"/>
                     <a:ea typeface="Times New Roman"/>
                     <a:cs typeface="Times New Roman"/>
                   </a:rPr>
@@ -11724,7 +11724,7 @@
                     <a:solidFill>
                       <a:srgbClr val="222222"/>
                     </a:solidFill>
-                    <a:latin typeface="Times New Roman"/>
+                    <a:latin typeface="Arial"/>
                     <a:ea typeface="Times New Roman"/>
                     <a:cs typeface="Times New Roman"/>
                   </a:rPr>
@@ -11777,7 +11777,7 @@
                     <a:solidFill>
                       <a:srgbClr val="222222"/>
                     </a:solidFill>
-                    <a:latin typeface="Times New Roman"/>
+                    <a:latin typeface="Arial"/>
                     <a:ea typeface="Times New Roman"/>
                     <a:cs typeface="Times New Roman"/>
                   </a:rPr>
@@ -11830,7 +11830,7 @@
                     <a:solidFill>
                       <a:srgbClr val="222222"/>
                     </a:solidFill>
-                    <a:latin typeface="Times New Roman"/>
+                    <a:latin typeface="Arial"/>
                     <a:ea typeface="Times New Roman"/>
                     <a:cs typeface="Times New Roman"/>
                   </a:rPr>
@@ -11883,7 +11883,7 @@
                     <a:solidFill>
                       <a:srgbClr val="222222"/>
                     </a:solidFill>
-                    <a:latin typeface="Times New Roman"/>
+                    <a:latin typeface="Arial"/>
                     <a:ea typeface="Times New Roman"/>
                     <a:cs typeface="Times New Roman"/>
                   </a:rPr>
@@ -11936,7 +11936,7 @@
                     <a:solidFill>
                       <a:srgbClr val="222222"/>
                     </a:solidFill>
-                    <a:latin typeface="Times New Roman"/>
+                    <a:latin typeface="Arial"/>
                     <a:ea typeface="Times New Roman"/>
                     <a:cs typeface="Times New Roman"/>
                   </a:rPr>
@@ -11989,7 +11989,7 @@
                     <a:solidFill>
                       <a:srgbClr val="222222"/>
                     </a:solidFill>
-                    <a:latin typeface="Times New Roman"/>
+                    <a:latin typeface="Arial"/>
                     <a:ea typeface="Times New Roman"/>
                     <a:cs typeface="Times New Roman"/>
                   </a:rPr>
@@ -12042,7 +12042,7 @@
                     <a:solidFill>
                       <a:srgbClr val="222222"/>
                     </a:solidFill>
-                    <a:latin typeface="Times New Roman"/>
+                    <a:latin typeface="Arial"/>
                     <a:ea typeface="Times New Roman"/>
                     <a:cs typeface="Times New Roman"/>
                   </a:rPr>
@@ -12061,7 +12061,7 @@
                     <a:solidFill>
                       <a:srgbClr val="222222"/>
                     </a:solidFill>
-                    <a:latin typeface="Times New Roman"/>
+                    <a:latin typeface="Arial"/>
                     <a:ea typeface="Times New Roman"/>
                     <a:cs typeface="Times New Roman"/>
                   </a:rPr>
@@ -15043,7 +15043,7 @@
                     <a:solidFill>
                       <a:srgbClr val="FFFFFF"/>
                     </a:solidFill>
-                    <a:latin typeface="Times New Roman"/>
+                    <a:latin typeface="Arial"/>
                     <a:ea typeface="Times New Roman"/>
                     <a:cs typeface="Times New Roman"/>
                   </a:rPr>
@@ -15096,7 +15096,7 @@
                     <a:solidFill>
                       <a:srgbClr val="222222"/>
                     </a:solidFill>
-                    <a:latin typeface="Times New Roman"/>
+                    <a:latin typeface="Comic Sans MS"/>
                     <a:ea typeface="Times New Roman"/>
                     <a:cs typeface="Times New Roman"/>
                   </a:rPr>
@@ -15149,7 +15149,7 @@
                     <a:solidFill>
                       <a:srgbClr val="222222"/>
                     </a:solidFill>
-                    <a:latin typeface="Times New Roman"/>
+                    <a:latin typeface="Arial"/>
                     <a:ea typeface="Times New Roman"/>
                     <a:cs typeface="Times New Roman"/>
                   </a:rPr>
@@ -15160,7 +15160,7 @@
                     <a:solidFill>
                       <a:srgbClr val="222222"/>
                     </a:solidFill>
-                    <a:latin typeface="Times New Roman"/>
+                    <a:latin typeface="Arial"/>
                     <a:ea typeface="Times New Roman"/>
                     <a:cs typeface="Times New Roman"/>
                   </a:rPr>
@@ -15213,7 +15213,7 @@
                     <a:solidFill>
                       <a:srgbClr val="222222"/>
                     </a:solidFill>
-                    <a:latin typeface="Times New Roman"/>
+                    <a:latin typeface="Arial"/>
                     <a:ea typeface="Times New Roman"/>
                     <a:cs typeface="Times New Roman"/>
                   </a:rPr>
@@ -15266,7 +15266,7 @@
                     <a:solidFill>
                       <a:srgbClr val="222222"/>
                     </a:solidFill>
-                    <a:latin typeface="Times New Roman"/>
+                    <a:latin typeface="Arial"/>
                     <a:ea typeface="Times New Roman"/>
                     <a:cs typeface="Times New Roman"/>
                   </a:rPr>
@@ -15319,7 +15319,7 @@
                     <a:solidFill>
                       <a:srgbClr val="222222"/>
                     </a:solidFill>
-                    <a:latin typeface="Times New Roman"/>
+                    <a:latin typeface="Arial"/>
                     <a:ea typeface="Times New Roman"/>
                     <a:cs typeface="Times New Roman"/>
                   </a:rPr>
@@ -15372,7 +15372,7 @@
                     <a:solidFill>
                       <a:srgbClr val="222222"/>
                     </a:solidFill>
-                    <a:latin typeface="Times New Roman"/>
+                    <a:latin typeface="Arial"/>
                     <a:ea typeface="Times New Roman"/>
                     <a:cs typeface="Times New Roman"/>
                   </a:rPr>
@@ -15425,7 +15425,7 @@
                     <a:solidFill>
                       <a:srgbClr val="222222"/>
                     </a:solidFill>
-                    <a:latin typeface="Times New Roman"/>
+                    <a:latin typeface="Arial"/>
                     <a:ea typeface="Times New Roman"/>
                     <a:cs typeface="Times New Roman"/>
                   </a:rPr>
@@ -15478,7 +15478,7 @@
                     <a:solidFill>
                       <a:srgbClr val="222222"/>
                     </a:solidFill>
-                    <a:latin typeface="Times New Roman"/>
+                    <a:latin typeface="Arial"/>
                     <a:ea typeface="Times New Roman"/>
                     <a:cs typeface="Times New Roman"/>
                   </a:rPr>
@@ -15531,7 +15531,7 @@
                     <a:solidFill>
                       <a:srgbClr val="222222"/>
                     </a:solidFill>
-                    <a:latin typeface="Times New Roman"/>
+                    <a:latin typeface="Arial"/>
                     <a:ea typeface="Times New Roman"/>
                     <a:cs typeface="Times New Roman"/>
                   </a:rPr>
@@ -15550,7 +15550,7 @@
                     <a:solidFill>
                       <a:srgbClr val="222222"/>
                     </a:solidFill>
-                    <a:latin typeface="Times New Roman"/>
+                    <a:latin typeface="Arial"/>
                     <a:ea typeface="Times New Roman"/>
                     <a:cs typeface="Times New Roman"/>
                   </a:rPr>
@@ -15603,7 +15603,7 @@
                     <a:solidFill>
                       <a:srgbClr val="222222"/>
                     </a:solidFill>
-                    <a:latin typeface="Times New Roman"/>
+                    <a:latin typeface="Arial"/>
                     <a:ea typeface="Times New Roman"/>
                     <a:cs typeface="Times New Roman"/>
                   </a:rPr>
@@ -15656,7 +15656,7 @@
                     <a:solidFill>
                       <a:srgbClr val="222222"/>
                     </a:solidFill>
-                    <a:latin typeface="Times New Roman"/>
+                    <a:latin typeface="Arial"/>
                     <a:ea typeface="Times New Roman"/>
                     <a:cs typeface="Times New Roman"/>
                   </a:rPr>
@@ -15709,7 +15709,7 @@
                     <a:solidFill>
                       <a:srgbClr val="222222"/>
                     </a:solidFill>
-                    <a:latin typeface="Times New Roman"/>
+                    <a:latin typeface="Arial"/>
                     <a:ea typeface="Times New Roman"/>
                     <a:cs typeface="Times New Roman"/>
                   </a:rPr>
